--- a/docs/PrivacyLens_PECATHON26.pptx
+++ b/docs/PrivacyLens_PECATHON26.pptx
@@ -1908,7 +1908,7 @@
                 <a:ea typeface="Arial" pitchFamily="34" charset="-122"/>
                 <a:cs typeface="Arial" pitchFamily="34" charset="-120"/>
               </a:rPr>
-              <a:t>PECATHON'26  |  PS-004  |  Bhagyadutta and Anmol</a:t>
+              <a:t>PECATHON'26  |  PS-004  |  Team code PF-A73PXS</a:t>
             </a:r>
             <a:endParaRPr lang="en-US" sz="1600" dirty="0"/>
           </a:p>
